--- a/tests/output/pptx-test/04-click-triggers.pptx
+++ b/tests/output/pptx-test/04-click-triggers.pptx
@@ -209,7 +209,7 @@
                   <p:par>
                     <p:cTn id="3" fill="hold">
                       <p:stCondLst>
-                        <p:cond delay="0"/>
+                        <p:cond delay="indefinite"/>
                       </p:stCondLst>
                       <p:childTnLst>
                         <p:par>
@@ -299,7 +299,7 @@
                   <p:par>
                     <p:cTn id="9" fill="hold">
                       <p:stCondLst>
-                        <p:cond delay="0"/>
+                        <p:cond delay="indefinite"/>
                       </p:stCondLst>
                       <p:childTnLst>
                         <p:par>
@@ -353,7 +353,7 @@
                   <p:par>
                     <p:cTn id="14" fill="hold">
                       <p:stCondLst>
-                        <p:cond delay="0"/>
+                        <p:cond delay="indefinite"/>
                       </p:stCondLst>
                       <p:childTnLst>
                         <p:par>
